--- a/submissions doc:non code/Midterm_Project_Draft_Presentation.pptx
+++ b/submissions doc:non code/Midterm_Project_Draft_Presentation.pptx
@@ -111,6 +111,11 @@
       </a:defRPr>
     </a:lvl9pPr>
   </p:defaultTextStyle>
+  <p:extLst>
+    <p:ext uri="{EFAFB233-063F-42B5-8137-9DF3F51BA10A}">
+      <p15:sldGuideLst xmlns:p15="http://schemas.microsoft.com/office/powerpoint/2012/main"/>
+    </p:ext>
+  </p:extLst>
 </p:presentation>
 </file>
 
@@ -261,7 +266,7 @@
           <a:p>
             <a:fld id="{0CFEF85F-FA20-2440-9073-8C4E6F560575}" type="datetimeFigureOut">
               <a:rPr lang="en-US" smtClean="0"/>
-              <a:t>10/16/26</a:t>
+              <a:t>10/21/26</a:t>
             </a:fld>
             <a:endParaRPr lang="en-US"/>
           </a:p>
@@ -459,7 +464,7 @@
           <a:p>
             <a:fld id="{0CFEF85F-FA20-2440-9073-8C4E6F560575}" type="datetimeFigureOut">
               <a:rPr lang="en-US" smtClean="0"/>
-              <a:t>10/16/26</a:t>
+              <a:t>10/21/26</a:t>
             </a:fld>
             <a:endParaRPr lang="en-US"/>
           </a:p>
@@ -667,7 +672,7 @@
           <a:p>
             <a:fld id="{0CFEF85F-FA20-2440-9073-8C4E6F560575}" type="datetimeFigureOut">
               <a:rPr lang="en-US" smtClean="0"/>
-              <a:t>10/16/26</a:t>
+              <a:t>10/21/26</a:t>
             </a:fld>
             <a:endParaRPr lang="en-US"/>
           </a:p>
@@ -865,7 +870,7 @@
           <a:p>
             <a:fld id="{0CFEF85F-FA20-2440-9073-8C4E6F560575}" type="datetimeFigureOut">
               <a:rPr lang="en-US" smtClean="0"/>
-              <a:t>10/16/26</a:t>
+              <a:t>10/21/26</a:t>
             </a:fld>
             <a:endParaRPr lang="en-US"/>
           </a:p>
@@ -1140,7 +1145,7 @@
           <a:p>
             <a:fld id="{0CFEF85F-FA20-2440-9073-8C4E6F560575}" type="datetimeFigureOut">
               <a:rPr lang="en-US" smtClean="0"/>
-              <a:t>10/16/26</a:t>
+              <a:t>10/21/26</a:t>
             </a:fld>
             <a:endParaRPr lang="en-US"/>
           </a:p>
@@ -1405,7 +1410,7 @@
           <a:p>
             <a:fld id="{0CFEF85F-FA20-2440-9073-8C4E6F560575}" type="datetimeFigureOut">
               <a:rPr lang="en-US" smtClean="0"/>
-              <a:t>10/16/26</a:t>
+              <a:t>10/21/26</a:t>
             </a:fld>
             <a:endParaRPr lang="en-US"/>
           </a:p>
@@ -1817,7 +1822,7 @@
           <a:p>
             <a:fld id="{0CFEF85F-FA20-2440-9073-8C4E6F560575}" type="datetimeFigureOut">
               <a:rPr lang="en-US" smtClean="0"/>
-              <a:t>10/16/26</a:t>
+              <a:t>10/21/26</a:t>
             </a:fld>
             <a:endParaRPr lang="en-US"/>
           </a:p>
@@ -1958,7 +1963,7 @@
           <a:p>
             <a:fld id="{0CFEF85F-FA20-2440-9073-8C4E6F560575}" type="datetimeFigureOut">
               <a:rPr lang="en-US" smtClean="0"/>
-              <a:t>10/16/26</a:t>
+              <a:t>10/21/26</a:t>
             </a:fld>
             <a:endParaRPr lang="en-US"/>
           </a:p>
@@ -2071,7 +2076,7 @@
           <a:p>
             <a:fld id="{0CFEF85F-FA20-2440-9073-8C4E6F560575}" type="datetimeFigureOut">
               <a:rPr lang="en-US" smtClean="0"/>
-              <a:t>10/16/26</a:t>
+              <a:t>10/21/26</a:t>
             </a:fld>
             <a:endParaRPr lang="en-US"/>
           </a:p>
@@ -2382,7 +2387,7 @@
           <a:p>
             <a:fld id="{0CFEF85F-FA20-2440-9073-8C4E6F560575}" type="datetimeFigureOut">
               <a:rPr lang="en-US" smtClean="0"/>
-              <a:t>10/16/26</a:t>
+              <a:t>10/21/26</a:t>
             </a:fld>
             <a:endParaRPr lang="en-US"/>
           </a:p>
@@ -2670,7 +2675,7 @@
           <a:p>
             <a:fld id="{0CFEF85F-FA20-2440-9073-8C4E6F560575}" type="datetimeFigureOut">
               <a:rPr lang="en-US" smtClean="0"/>
-              <a:t>10/16/26</a:t>
+              <a:t>10/21/26</a:t>
             </a:fld>
             <a:endParaRPr lang="en-US"/>
           </a:p>
@@ -2911,7 +2916,7 @@
           <a:p>
             <a:fld id="{0CFEF85F-FA20-2440-9073-8C4E6F560575}" type="datetimeFigureOut">
               <a:rPr lang="en-US" smtClean="0"/>
-              <a:t>10/16/26</a:t>
+              <a:t>10/21/26</a:t>
             </a:fld>
             <a:endParaRPr lang="en-US"/>
           </a:p>
@@ -3849,37 +3854,25 @@
           <a:p>
             <a:r>
               <a:rPr lang="en-US" sz="1400" b="1" dirty="0"/>
-              <a:t>84.7%</a:t>
-            </a:r>
-            <a:r>
-              <a:rPr lang="en-US" sz="1400" dirty="0"/>
-              <a:t> - Songs have high energy in this dataset.</a:t>
+              <a:t>Genre explains only about 10% of how a song feels, only EDM really stands apart.</a:t>
             </a:r>
           </a:p>
           <a:p>
             <a:r>
               <a:rPr lang="en-US" sz="1400" b="1" dirty="0"/>
-              <a:t>63.6%</a:t>
-            </a:r>
-            <a:r>
-              <a:rPr lang="en-US" sz="1400" dirty="0"/>
-              <a:t> - EDM songs fall into the negative + energetic group.</a:t>
+              <a:t>Popularity has almost no link to how a song sounds.</a:t>
             </a:r>
           </a:p>
           <a:p>
             <a:r>
               <a:rPr lang="en-US" sz="1400" b="1" dirty="0"/>
-              <a:t>63.0%</a:t>
-            </a:r>
-            <a:r>
-              <a:rPr lang="en-US" sz="1400" dirty="0"/>
-              <a:t> - Latin songs fall into the positive + energetic group.</a:t>
+              <a:t>Music got sadder after 2013 while energy stayed high.</a:t>
             </a:r>
           </a:p>
           <a:p>
             <a:r>
               <a:rPr lang="en-US" sz="1400" i="1" dirty="0"/>
-              <a:t>Genres have different overall mood patterns, but there’s still a lot of variety within each genre.</a:t>
+              <a:t>So mood beats genre and popularity for how a song feels.</a:t>
             </a:r>
             <a:endParaRPr lang="en-US" sz="1400" dirty="0"/>
           </a:p>
@@ -3976,7 +3969,7 @@
             </a:pPr>
             <a:r>
               <a:rPr lang="en-US" i="1" dirty="0"/>
-              <a:t>An interactive way to explore songs based on their mood, genre, and popularity.</a:t>
+              <a:t>An interactive way to explore songs by how they feel, not just by genre or popularity.</a:t>
             </a:r>
             <a:endParaRPr lang="en-US" dirty="0"/>
           </a:p>
@@ -3995,7 +3988,7 @@
             </a:pPr>
             <a:r>
               <a:rPr lang="en-US" dirty="0"/>
-              <a:t>01 - Choose a Mood - Pick the kind of music you’re looking for.</a:t>
+              <a:t>01 - Find your vibe. Pick a mood, genre and popularity and explore the matches on a mood map.</a:t>
             </a:r>
           </a:p>
           <a:p>
@@ -4004,7 +3997,7 @@
             </a:pPr>
             <a:r>
               <a:rPr lang="en-US" dirty="0"/>
-              <a:t>02 - Filter Your Songs - Choose genres and adjust popularity to discover hidden gems.</a:t>
+              <a:t>02 - See how mood changed over time. Music got sadder after 2013 but stayed just as energetic.</a:t>
             </a:r>
           </a:p>
           <a:p>
@@ -4013,7 +4006,7 @@
             </a:pPr>
             <a:r>
               <a:rPr lang="en-US" dirty="0"/>
-              <a:t>03 - Explore Your Results - See matching songs on the mood map and in a playlist-style table.</a:t>
+              <a:t>03 - Find similar songs. Pick any song and get the closest matches by how they actually sound, across genres.</a:t>
             </a:r>
           </a:p>
           <a:p>
@@ -4040,6 +4033,14 @@
 <file path=ppt/slides/slide6.xml><?xml version="1.0" encoding="utf-8"?>
 <p:sld xmlns:a="http://schemas.openxmlformats.org/drawingml/2006/main" xmlns:r="http://schemas.openxmlformats.org/officeDocument/2006/relationships" xmlns:p="http://schemas.openxmlformats.org/presentationml/2006/main">
   <p:cSld>
+    <p:bg>
+      <p:bgPr>
+        <a:solidFill>
+          <a:schemeClr val="bg1"/>
+        </a:solidFill>
+        <a:effectLst/>
+      </p:bgPr>
+    </p:bg>
     <p:spTree>
       <p:nvGrpSpPr>
         <p:cNvPr id="1" name="">
@@ -4060,12 +4061,167 @@
           <a:chExt cx="0" cy="0"/>
         </a:xfrm>
       </p:grpSpPr>
+      <p:sp>
+        <p:nvSpPr>
+          <p:cNvPr id="9" name="Rectangle 8">
+            <a:extLst>
+              <a:ext uri="{FF2B5EF4-FFF2-40B4-BE49-F238E27FC236}">
+                <a16:creationId xmlns:a16="http://schemas.microsoft.com/office/drawing/2014/main" id="{42A4FC2C-047E-45A5-965D-8E1E3BF09BC6}"/>
+              </a:ext>
+              <a:ext uri="{C183D7F6-B498-43B3-948B-1728B52AA6E4}">
+                <adec:decorative xmlns:adec="http://schemas.microsoft.com/office/drawing/2017/decorative" val="1"/>
+              </a:ext>
+            </a:extLst>
+          </p:cNvPr>
+          <p:cNvSpPr>
+            <a:spLocks noGrp="1" noRot="1" noChangeAspect="1" noMove="1" noResize="1" noEditPoints="1" noAdjustHandles="1" noChangeArrowheads="1" noChangeShapeType="1" noTextEdit="1"/>
+          </p:cNvSpPr>
+          <p:nvPr>
+            <p:extLst>
+              <p:ext uri="{386F3935-93C4-4BCD-93E2-E3B085C9AB24}">
+                <p16:designElem xmlns:p16="http://schemas.microsoft.com/office/powerpoint/2015/main" val="1"/>
+              </p:ext>
+            </p:extLst>
+          </p:nvPr>
+        </p:nvSpPr>
+        <p:spPr bwMode="white">
+          <a:xfrm>
+            <a:off x="1524" y="0"/>
+            <a:ext cx="12188952" cy="6858000"/>
+          </a:xfrm>
+          <a:prstGeom prst="rect">
+            <a:avLst/>
+          </a:prstGeom>
+          <a:noFill/>
+          <a:ln>
+            <a:noFill/>
+          </a:ln>
+        </p:spPr>
+        <p:style>
+          <a:lnRef idx="2">
+            <a:schemeClr val="accent1">
+              <a:shade val="50000"/>
+            </a:schemeClr>
+          </a:lnRef>
+          <a:fillRef idx="1">
+            <a:schemeClr val="accent1"/>
+          </a:fillRef>
+          <a:effectRef idx="0">
+            <a:schemeClr val="accent1"/>
+          </a:effectRef>
+          <a:fontRef idx="minor">
+            <a:schemeClr val="lt1"/>
+          </a:fontRef>
+        </p:style>
+        <p:txBody>
+          <a:bodyPr rtlCol="0" anchor="ctr"/>
+          <a:lstStyle>
+            <a:defPPr>
+              <a:defRPr lang="en-US"/>
+            </a:defPPr>
+            <a:lvl1pPr marL="0" algn="l" defTabSz="914400" rtl="0" eaLnBrk="1" latinLnBrk="0" hangingPunct="1">
+              <a:defRPr sz="1800" kern="1200">
+                <a:solidFill>
+                  <a:schemeClr val="lt1"/>
+                </a:solidFill>
+                <a:latin typeface="+mn-lt"/>
+                <a:ea typeface="+mn-ea"/>
+                <a:cs typeface="+mn-cs"/>
+              </a:defRPr>
+            </a:lvl1pPr>
+            <a:lvl2pPr marL="457200" algn="l" defTabSz="914400" rtl="0" eaLnBrk="1" latinLnBrk="0" hangingPunct="1">
+              <a:defRPr sz="1800" kern="1200">
+                <a:solidFill>
+                  <a:schemeClr val="lt1"/>
+                </a:solidFill>
+                <a:latin typeface="+mn-lt"/>
+                <a:ea typeface="+mn-ea"/>
+                <a:cs typeface="+mn-cs"/>
+              </a:defRPr>
+            </a:lvl2pPr>
+            <a:lvl3pPr marL="914400" algn="l" defTabSz="914400" rtl="0" eaLnBrk="1" latinLnBrk="0" hangingPunct="1">
+              <a:defRPr sz="1800" kern="1200">
+                <a:solidFill>
+                  <a:schemeClr val="lt1"/>
+                </a:solidFill>
+                <a:latin typeface="+mn-lt"/>
+                <a:ea typeface="+mn-ea"/>
+                <a:cs typeface="+mn-cs"/>
+              </a:defRPr>
+            </a:lvl3pPr>
+            <a:lvl4pPr marL="1371600" algn="l" defTabSz="914400" rtl="0" eaLnBrk="1" latinLnBrk="0" hangingPunct="1">
+              <a:defRPr sz="1800" kern="1200">
+                <a:solidFill>
+                  <a:schemeClr val="lt1"/>
+                </a:solidFill>
+                <a:latin typeface="+mn-lt"/>
+                <a:ea typeface="+mn-ea"/>
+                <a:cs typeface="+mn-cs"/>
+              </a:defRPr>
+            </a:lvl4pPr>
+            <a:lvl5pPr marL="1828800" algn="l" defTabSz="914400" rtl="0" eaLnBrk="1" latinLnBrk="0" hangingPunct="1">
+              <a:defRPr sz="1800" kern="1200">
+                <a:solidFill>
+                  <a:schemeClr val="lt1"/>
+                </a:solidFill>
+                <a:latin typeface="+mn-lt"/>
+                <a:ea typeface="+mn-ea"/>
+                <a:cs typeface="+mn-cs"/>
+              </a:defRPr>
+            </a:lvl5pPr>
+            <a:lvl6pPr marL="2286000" algn="l" defTabSz="914400" rtl="0" eaLnBrk="1" latinLnBrk="0" hangingPunct="1">
+              <a:defRPr sz="1800" kern="1200">
+                <a:solidFill>
+                  <a:schemeClr val="lt1"/>
+                </a:solidFill>
+                <a:latin typeface="+mn-lt"/>
+                <a:ea typeface="+mn-ea"/>
+                <a:cs typeface="+mn-cs"/>
+              </a:defRPr>
+            </a:lvl6pPr>
+            <a:lvl7pPr marL="2743200" algn="l" defTabSz="914400" rtl="0" eaLnBrk="1" latinLnBrk="0" hangingPunct="1">
+              <a:defRPr sz="1800" kern="1200">
+                <a:solidFill>
+                  <a:schemeClr val="lt1"/>
+                </a:solidFill>
+                <a:latin typeface="+mn-lt"/>
+                <a:ea typeface="+mn-ea"/>
+                <a:cs typeface="+mn-cs"/>
+              </a:defRPr>
+            </a:lvl7pPr>
+            <a:lvl8pPr marL="3200400" algn="l" defTabSz="914400" rtl="0" eaLnBrk="1" latinLnBrk="0" hangingPunct="1">
+              <a:defRPr sz="1800" kern="1200">
+                <a:solidFill>
+                  <a:schemeClr val="lt1"/>
+                </a:solidFill>
+                <a:latin typeface="+mn-lt"/>
+                <a:ea typeface="+mn-ea"/>
+                <a:cs typeface="+mn-cs"/>
+              </a:defRPr>
+            </a:lvl8pPr>
+            <a:lvl9pPr marL="3657600" algn="l" defTabSz="914400" rtl="0" eaLnBrk="1" latinLnBrk="0" hangingPunct="1">
+              <a:defRPr sz="1800" kern="1200">
+                <a:solidFill>
+                  <a:schemeClr val="lt1"/>
+                </a:solidFill>
+                <a:latin typeface="+mn-lt"/>
+                <a:ea typeface="+mn-ea"/>
+                <a:cs typeface="+mn-cs"/>
+              </a:defRPr>
+            </a:lvl9pPr>
+          </a:lstStyle>
+          <a:p>
+            <a:pPr algn="ctr"/>
+            <a:endParaRPr lang="en-US"/>
+          </a:p>
+        </p:txBody>
+      </p:sp>
       <p:pic>
         <p:nvPicPr>
-          <p:cNvPr id="3" name="Picture 2">
-            <a:extLst>
-              <a:ext uri="{FF2B5EF4-FFF2-40B4-BE49-F238E27FC236}">
-                <a16:creationId xmlns:a16="http://schemas.microsoft.com/office/drawing/2014/main" id="{335EF90D-875E-06F3-2BF6-F9B14F02AD6A}"/>
+          <p:cNvPr id="4" name="Picture 3">
+            <a:extLst>
+              <a:ext uri="{FF2B5EF4-FFF2-40B4-BE49-F238E27FC236}">
+                <a16:creationId xmlns:a16="http://schemas.microsoft.com/office/drawing/2014/main" id="{66CE1470-5A08-86DF-EEEC-BA75888FD9D5}"/>
               </a:ext>
             </a:extLst>
           </p:cNvPr>
@@ -4076,14 +4232,15 @@
         </p:nvPicPr>
         <p:blipFill>
           <a:blip r:embed="rId2"/>
+          <a:srcRect t="6748" b="7717"/>
           <a:stretch>
             <a:fillRect/>
           </a:stretch>
         </p:blipFill>
         <p:spPr>
           <a:xfrm>
-            <a:off x="1070599" y="276461"/>
-            <a:ext cx="10050802" cy="6305078"/>
+            <a:off x="741576" y="417695"/>
+            <a:ext cx="10708847" cy="6022610"/>
           </a:xfrm>
           <a:prstGeom prst="rect">
             <a:avLst/>
@@ -4309,37 +4466,37 @@
           <a:p>
             <a:r>
               <a:rPr lang="en-US" dirty="0"/>
-              <a:t>Find Similar Songs</a:t>
+              <a:t>Add lyrics and emotion analysis</a:t>
             </a:r>
           </a:p>
           <a:p>
             <a:r>
               <a:rPr lang="en-US" dirty="0"/>
-              <a:t>Let users choose a song and find others with similar audio features.</a:t>
+              <a:t>Compare how a song sounds vs how its lyrics read.</a:t>
             </a:r>
           </a:p>
           <a:p>
             <a:r>
               <a:rPr lang="en-US" dirty="0"/>
-              <a:t>Improve Song Discovery</a:t>
+              <a:t>Cluster songs into vibes</a:t>
             </a:r>
           </a:p>
           <a:p>
             <a:r>
               <a:rPr lang="en-US" dirty="0"/>
-              <a:t>Make it easier to find less-popular songs that match a specific vibe.</a:t>
+              <a:t>Group songs automatically instead of fixed cutoffs.</a:t>
             </a:r>
           </a:p>
           <a:p>
             <a:r>
               <a:rPr lang="en-US" dirty="0"/>
-              <a:t>Improve the App</a:t>
+              <a:t>Deploy the app</a:t>
             </a:r>
           </a:p>
           <a:p>
             <a:r>
               <a:rPr lang="en-US" dirty="0"/>
-              <a:t>Continue refining the visualizations and user experience.</a:t>
+              <a:t>Put it online so anyone can try it.</a:t>
             </a:r>
           </a:p>
           <a:p>

--- a/submissions doc:non code/Midterm_Project_Draft_Presentation.pptx
+++ b/submissions doc:non code/Midterm_Project_Draft_Presentation.pptx
@@ -266,7 +266,7 @@
           <a:p>
             <a:fld id="{0CFEF85F-FA20-2440-9073-8C4E6F560575}" type="datetimeFigureOut">
               <a:rPr lang="en-US" smtClean="0"/>
-              <a:t>10/21/26</a:t>
+              <a:t>10/22/26</a:t>
             </a:fld>
             <a:endParaRPr lang="en-US"/>
           </a:p>
@@ -464,7 +464,7 @@
           <a:p>
             <a:fld id="{0CFEF85F-FA20-2440-9073-8C4E6F560575}" type="datetimeFigureOut">
               <a:rPr lang="en-US" smtClean="0"/>
-              <a:t>10/21/26</a:t>
+              <a:t>10/22/26</a:t>
             </a:fld>
             <a:endParaRPr lang="en-US"/>
           </a:p>
@@ -672,7 +672,7 @@
           <a:p>
             <a:fld id="{0CFEF85F-FA20-2440-9073-8C4E6F560575}" type="datetimeFigureOut">
               <a:rPr lang="en-US" smtClean="0"/>
-              <a:t>10/21/26</a:t>
+              <a:t>10/22/26</a:t>
             </a:fld>
             <a:endParaRPr lang="en-US"/>
           </a:p>
@@ -870,7 +870,7 @@
           <a:p>
             <a:fld id="{0CFEF85F-FA20-2440-9073-8C4E6F560575}" type="datetimeFigureOut">
               <a:rPr lang="en-US" smtClean="0"/>
-              <a:t>10/21/26</a:t>
+              <a:t>10/22/26</a:t>
             </a:fld>
             <a:endParaRPr lang="en-US"/>
           </a:p>
@@ -1145,7 +1145,7 @@
           <a:p>
             <a:fld id="{0CFEF85F-FA20-2440-9073-8C4E6F560575}" type="datetimeFigureOut">
               <a:rPr lang="en-US" smtClean="0"/>
-              <a:t>10/21/26</a:t>
+              <a:t>10/22/26</a:t>
             </a:fld>
             <a:endParaRPr lang="en-US"/>
           </a:p>
@@ -1410,7 +1410,7 @@
           <a:p>
             <a:fld id="{0CFEF85F-FA20-2440-9073-8C4E6F560575}" type="datetimeFigureOut">
               <a:rPr lang="en-US" smtClean="0"/>
-              <a:t>10/21/26</a:t>
+              <a:t>10/22/26</a:t>
             </a:fld>
             <a:endParaRPr lang="en-US"/>
           </a:p>
@@ -1822,7 +1822,7 @@
           <a:p>
             <a:fld id="{0CFEF85F-FA20-2440-9073-8C4E6F560575}" type="datetimeFigureOut">
               <a:rPr lang="en-US" smtClean="0"/>
-              <a:t>10/21/26</a:t>
+              <a:t>10/22/26</a:t>
             </a:fld>
             <a:endParaRPr lang="en-US"/>
           </a:p>
@@ -1963,7 +1963,7 @@
           <a:p>
             <a:fld id="{0CFEF85F-FA20-2440-9073-8C4E6F560575}" type="datetimeFigureOut">
               <a:rPr lang="en-US" smtClean="0"/>
-              <a:t>10/21/26</a:t>
+              <a:t>10/22/26</a:t>
             </a:fld>
             <a:endParaRPr lang="en-US"/>
           </a:p>
@@ -2076,7 +2076,7 @@
           <a:p>
             <a:fld id="{0CFEF85F-FA20-2440-9073-8C4E6F560575}" type="datetimeFigureOut">
               <a:rPr lang="en-US" smtClean="0"/>
-              <a:t>10/21/26</a:t>
+              <a:t>10/22/26</a:t>
             </a:fld>
             <a:endParaRPr lang="en-US"/>
           </a:p>
@@ -2387,7 +2387,7 @@
           <a:p>
             <a:fld id="{0CFEF85F-FA20-2440-9073-8C4E6F560575}" type="datetimeFigureOut">
               <a:rPr lang="en-US" smtClean="0"/>
-              <a:t>10/21/26</a:t>
+              <a:t>10/22/26</a:t>
             </a:fld>
             <a:endParaRPr lang="en-US"/>
           </a:p>
@@ -2675,7 +2675,7 @@
           <a:p>
             <a:fld id="{0CFEF85F-FA20-2440-9073-8C4E6F560575}" type="datetimeFigureOut">
               <a:rPr lang="en-US" smtClean="0"/>
-              <a:t>10/21/26</a:t>
+              <a:t>10/22/26</a:t>
             </a:fld>
             <a:endParaRPr lang="en-US"/>
           </a:p>
@@ -2916,7 +2916,7 @@
           <a:p>
             <a:fld id="{0CFEF85F-FA20-2440-9073-8C4E6F560575}" type="datetimeFigureOut">
               <a:rPr lang="en-US" smtClean="0"/>
-              <a:t>10/21/26</a:t>
+              <a:t>10/22/26</a:t>
             </a:fld>
             <a:endParaRPr lang="en-US"/>
           </a:p>
